--- a/AgriFireShield_презентация.pptx
+++ b/AgriFireShield_презентация.pptx
@@ -276,11 +276,11 @@
           <c:showBubbleSize val="0"/>
         </c:dLbls>
         <c:gapWidth val="150"/>
-        <c:axId val="150280192"/>
-        <c:axId val="149884864"/>
+        <c:axId val="124635136"/>
+        <c:axId val="165318592"/>
       </c:barChart>
       <c:catAx>
-        <c:axId val="150280192"/>
+        <c:axId val="124635136"/>
         <c:scaling>
           <c:orientation val="minMax"/>
         </c:scaling>
@@ -314,7 +314,7 @@
             <a:endParaRPr lang="ru-RU"/>
           </a:p>
         </c:txPr>
-        <c:crossAx val="149884864"/>
+        <c:crossAx val="165318592"/>
         <c:crosses val="autoZero"/>
         <c:auto val="1"/>
         <c:lblAlgn val="ctr"/>
@@ -322,7 +322,7 @@
         <c:noMultiLvlLbl val="1"/>
       </c:catAx>
       <c:valAx>
-        <c:axId val="149884864"/>
+        <c:axId val="165318592"/>
         <c:scaling>
           <c:orientation val="minMax"/>
         </c:scaling>
@@ -367,7 +367,7 @@
             <a:endParaRPr lang="ru-RU"/>
           </a:p>
         </c:txPr>
-        <c:crossAx val="150280192"/>
+        <c:crossAx val="124635136"/>
         <c:crosses val="autoZero"/>
         <c:crossBetween val="between"/>
       </c:valAx>
@@ -3402,7 +3402,7 @@
         </p:nvSpPr>
         <p:spPr>
           <a:xfrm>
-            <a:off x="0" y="0"/>
+            <a:off x="0" y="13156"/>
             <a:ext cx="4114800" cy="5143500"/>
           </a:xfrm>
           <a:prstGeom prst="rect">
@@ -6730,7 +6730,23 @@
                   <a:srgbClr val="1A3A2A"/>
                 </a:solidFill>
               </a:rPr>
-              <a:t>💰 Субсидии</a:t>
+              <a:t>💰 </a:t>
+            </a:r>
+            <a:r>
+              <a:rPr lang="en-US" sz="1800" b="1" dirty="0" smtClean="0">
+                <a:solidFill>
+                  <a:srgbClr val="1A3A2A"/>
+                </a:solidFill>
+              </a:rPr>
+              <a:t>  </a:t>
+            </a:r>
+            <a:r>
+              <a:rPr lang="en-US" sz="1800" b="1" dirty="0" err="1" smtClean="0">
+                <a:solidFill>
+                  <a:srgbClr val="1A3A2A"/>
+                </a:solidFill>
+              </a:rPr>
+              <a:t>Субсидии</a:t>
             </a:r>
             <a:endParaRPr lang="en-US" sz="1800" dirty="0"/>
           </a:p>
@@ -7202,7 +7218,39 @@
                   <a:srgbClr val="1A3A2A"/>
                 </a:solidFill>
               </a:rPr>
-              <a:t>🌾 Урожайность 2024</a:t>
+              <a:t>🌾 </a:t>
+            </a:r>
+            <a:r>
+              <a:rPr lang="en-US" sz="1800" b="1" dirty="0" smtClean="0">
+                <a:solidFill>
+                  <a:srgbClr val="1A3A2A"/>
+                </a:solidFill>
+              </a:rPr>
+              <a:t>   </a:t>
+            </a:r>
+            <a:r>
+              <a:rPr lang="en-US" sz="1800" b="1" dirty="0" err="1" smtClean="0">
+                <a:solidFill>
+                  <a:srgbClr val="1A3A2A"/>
+                </a:solidFill>
+              </a:rPr>
+              <a:t>Урожайность</a:t>
+            </a:r>
+            <a:r>
+              <a:rPr lang="en-US" sz="1800" b="1" dirty="0" smtClean="0">
+                <a:solidFill>
+                  <a:srgbClr val="1A3A2A"/>
+                </a:solidFill>
+              </a:rPr>
+              <a:t> </a:t>
+            </a:r>
+            <a:r>
+              <a:rPr lang="en-US" sz="1800" b="1" dirty="0">
+                <a:solidFill>
+                  <a:srgbClr val="1A3A2A"/>
+                </a:solidFill>
+              </a:rPr>
+              <a:t>2024</a:t>
             </a:r>
             <a:endParaRPr lang="en-US" sz="1800" dirty="0"/>
           </a:p>
@@ -7856,7 +7904,39 @@
                   <a:srgbClr val="F0F5F0"/>
                 </a:solidFill>
               </a:rPr>
-              <a:t>🏛  Министерство сельского хозяйства РК</a:t>
+              <a:t>🏛  </a:t>
+            </a:r>
+            <a:r>
+              <a:rPr lang="en-US" sz="1300" dirty="0" smtClean="0">
+                <a:solidFill>
+                  <a:srgbClr val="F0F5F0"/>
+                </a:solidFill>
+              </a:rPr>
+              <a:t>  </a:t>
+            </a:r>
+            <a:r>
+              <a:rPr lang="en-US" sz="1300" dirty="0" err="1" smtClean="0">
+                <a:solidFill>
+                  <a:srgbClr val="F0F5F0"/>
+                </a:solidFill>
+              </a:rPr>
+              <a:t>Министерство</a:t>
+            </a:r>
+            <a:r>
+              <a:rPr lang="en-US" sz="1300" dirty="0" smtClean="0">
+                <a:solidFill>
+                  <a:srgbClr val="F0F5F0"/>
+                </a:solidFill>
+              </a:rPr>
+              <a:t> </a:t>
+            </a:r>
+            <a:r>
+              <a:rPr lang="en-US" sz="1300" dirty="0">
+                <a:solidFill>
+                  <a:srgbClr val="F0F5F0"/>
+                </a:solidFill>
+              </a:rPr>
+              <a:t>сельского хозяйства РК</a:t>
             </a:r>
             <a:endParaRPr lang="en-US" sz="1300" dirty="0"/>
           </a:p>
@@ -7887,12 +7967,36 @@
               <a:buNone/>
             </a:pPr>
             <a:r>
+              <a:rPr lang="en-US" sz="1300">
+                <a:solidFill>
+                  <a:srgbClr val="F0F5F0"/>
+                </a:solidFill>
+              </a:rPr>
+              <a:t>💳  </a:t>
+            </a:r>
+            <a:r>
+              <a:rPr lang="en-US" sz="1300" smtClean="0">
+                <a:solidFill>
+                  <a:srgbClr val="F0F5F0"/>
+                </a:solidFill>
+              </a:rPr>
+              <a:t>  </a:t>
+            </a:r>
+            <a:r>
+              <a:rPr lang="en-US" sz="1300" dirty="0" err="1" smtClean="0">
+                <a:solidFill>
+                  <a:srgbClr val="F0F5F0"/>
+                </a:solidFill>
+              </a:rPr>
+              <a:t>Субсидирование</a:t>
+            </a:r>
+            <a:r>
               <a:rPr lang="en-US" sz="1300" dirty="0">
                 <a:solidFill>
                   <a:srgbClr val="F0F5F0"/>
                 </a:solidFill>
               </a:rPr>
-              <a:t>💳  Субсидирование: прозрачный учёт потерь</a:t>
+              <a:t>: прозрачный учёт потерь</a:t>
             </a:r>
             <a:endParaRPr lang="en-US" sz="1300" dirty="0"/>
           </a:p>
@@ -7928,7 +8032,39 @@
                   <a:srgbClr val="F0F5F0"/>
                 </a:solidFill>
               </a:rPr>
-              <a:t>🌍  ГИС-платформы и агро-дашборды</a:t>
+              <a:t>🌍  </a:t>
+            </a:r>
+            <a:r>
+              <a:rPr lang="en-US" sz="1300" dirty="0" smtClean="0">
+                <a:solidFill>
+                  <a:srgbClr val="F0F5F0"/>
+                </a:solidFill>
+              </a:rPr>
+              <a:t>  ГИС-</a:t>
+            </a:r>
+            <a:r>
+              <a:rPr lang="en-US" sz="1300" dirty="0" err="1" smtClean="0">
+                <a:solidFill>
+                  <a:srgbClr val="F0F5F0"/>
+                </a:solidFill>
+              </a:rPr>
+              <a:t>платформы</a:t>
+            </a:r>
+            <a:r>
+              <a:rPr lang="en-US" sz="1300" dirty="0" smtClean="0">
+                <a:solidFill>
+                  <a:srgbClr val="F0F5F0"/>
+                </a:solidFill>
+              </a:rPr>
+              <a:t> </a:t>
+            </a:r>
+            <a:r>
+              <a:rPr lang="en-US" sz="1300" dirty="0">
+                <a:solidFill>
+                  <a:srgbClr val="F0F5F0"/>
+                </a:solidFill>
+              </a:rPr>
+              <a:t>и агро-дашборды</a:t>
             </a:r>
             <a:endParaRPr lang="en-US" sz="1300" dirty="0"/>
           </a:p>
@@ -7964,7 +8100,23 @@
                   <a:srgbClr val="F0F5F0"/>
                 </a:solidFill>
               </a:rPr>
-              <a:t>📡  IoT датчики и метеостанции</a:t>
+              <a:t>📡 </a:t>
+            </a:r>
+            <a:r>
+              <a:rPr lang="en-US" sz="1300" dirty="0" smtClean="0">
+                <a:solidFill>
+                  <a:srgbClr val="F0F5F0"/>
+                </a:solidFill>
+              </a:rPr>
+              <a:t>   </a:t>
+            </a:r>
+            <a:r>
+              <a:rPr lang="en-US" sz="1300" dirty="0">
+                <a:solidFill>
+                  <a:srgbClr val="F0F5F0"/>
+                </a:solidFill>
+              </a:rPr>
+              <a:t>IoT датчики и метеостанции</a:t>
             </a:r>
             <a:endParaRPr lang="en-US" sz="1300" dirty="0"/>
           </a:p>
@@ -8000,7 +8152,39 @@
                   <a:srgbClr val="F0F5F0"/>
                 </a:solidFill>
               </a:rPr>
-              <a:t>🏦  Агростраховые компании</a:t>
+              <a:t>🏦  </a:t>
+            </a:r>
+            <a:r>
+              <a:rPr lang="en-US" sz="1300" dirty="0" smtClean="0">
+                <a:solidFill>
+                  <a:srgbClr val="F0F5F0"/>
+                </a:solidFill>
+              </a:rPr>
+              <a:t>  </a:t>
+            </a:r>
+            <a:r>
+              <a:rPr lang="en-US" sz="1300" dirty="0" err="1" smtClean="0">
+                <a:solidFill>
+                  <a:srgbClr val="F0F5F0"/>
+                </a:solidFill>
+              </a:rPr>
+              <a:t>Агростраховые</a:t>
+            </a:r>
+            <a:r>
+              <a:rPr lang="en-US" sz="1300" dirty="0" smtClean="0">
+                <a:solidFill>
+                  <a:srgbClr val="F0F5F0"/>
+                </a:solidFill>
+              </a:rPr>
+              <a:t> </a:t>
+            </a:r>
+            <a:r>
+              <a:rPr lang="en-US" sz="1300" dirty="0">
+                <a:solidFill>
+                  <a:srgbClr val="F0F5F0"/>
+                </a:solidFill>
+              </a:rPr>
+              <a:t>компании</a:t>
             </a:r>
             <a:endParaRPr lang="en-US" sz="1300" dirty="0"/>
           </a:p>
@@ -8036,7 +8220,39 @@
                   <a:srgbClr val="F0F5F0"/>
                 </a:solidFill>
               </a:rPr>
-              <a:t>📊  Биржи сельхозпродукции</a:t>
+              <a:t>📊  </a:t>
+            </a:r>
+            <a:r>
+              <a:rPr lang="en-US" sz="1300" dirty="0" smtClean="0">
+                <a:solidFill>
+                  <a:srgbClr val="F0F5F0"/>
+                </a:solidFill>
+              </a:rPr>
+              <a:t>  </a:t>
+            </a:r>
+            <a:r>
+              <a:rPr lang="en-US" sz="1300" dirty="0" err="1" smtClean="0">
+                <a:solidFill>
+                  <a:srgbClr val="F0F5F0"/>
+                </a:solidFill>
+              </a:rPr>
+              <a:t>Биржи</a:t>
+            </a:r>
+            <a:r>
+              <a:rPr lang="en-US" sz="1300" dirty="0" smtClean="0">
+                <a:solidFill>
+                  <a:srgbClr val="F0F5F0"/>
+                </a:solidFill>
+              </a:rPr>
+              <a:t> </a:t>
+            </a:r>
+            <a:r>
+              <a:rPr lang="en-US" sz="1300" dirty="0">
+                <a:solidFill>
+                  <a:srgbClr val="F0F5F0"/>
+                </a:solidFill>
+              </a:rPr>
+              <a:t>сельхозпродукции</a:t>
             </a:r>
             <a:endParaRPr lang="en-US" sz="1300" dirty="0"/>
           </a:p>
@@ -8072,7 +8288,23 @@
                   <a:srgbClr val="F0F5F0"/>
                 </a:solidFill>
               </a:rPr>
-              <a:t>🚒  МЧС — оперативное реагирование</a:t>
+              <a:t>🚒  </a:t>
+            </a:r>
+            <a:r>
+              <a:rPr lang="en-US" sz="1300" dirty="0" smtClean="0">
+                <a:solidFill>
+                  <a:srgbClr val="F0F5F0"/>
+                </a:solidFill>
+              </a:rPr>
+              <a:t>  МЧС </a:t>
+            </a:r>
+            <a:r>
+              <a:rPr lang="en-US" sz="1300" dirty="0">
+                <a:solidFill>
+                  <a:srgbClr val="F0F5F0"/>
+                </a:solidFill>
+              </a:rPr>
+              <a:t>— оперативное реагирование</a:t>
             </a:r>
             <a:endParaRPr lang="en-US" sz="1300" dirty="0"/>
           </a:p>
@@ -8108,7 +8340,39 @@
                   <a:srgbClr val="F0F5F0"/>
                 </a:solidFill>
               </a:rPr>
-              <a:t>📲  Aitu (планируется) / Telegram API</a:t>
+              <a:t>📲  </a:t>
+            </a:r>
+            <a:r>
+              <a:rPr lang="en-US" sz="1300" dirty="0" smtClean="0">
+                <a:solidFill>
+                  <a:srgbClr val="F0F5F0"/>
+                </a:solidFill>
+              </a:rPr>
+              <a:t>  </a:t>
+            </a:r>
+            <a:r>
+              <a:rPr lang="en-US" sz="1300" dirty="0" err="1" smtClean="0">
+                <a:solidFill>
+                  <a:srgbClr val="F0F5F0"/>
+                </a:solidFill>
+              </a:rPr>
+              <a:t>Aitu</a:t>
+            </a:r>
+            <a:r>
+              <a:rPr lang="en-US" sz="1300" dirty="0" smtClean="0">
+                <a:solidFill>
+                  <a:srgbClr val="F0F5F0"/>
+                </a:solidFill>
+              </a:rPr>
+              <a:t> </a:t>
+            </a:r>
+            <a:r>
+              <a:rPr lang="en-US" sz="1300" dirty="0">
+                <a:solidFill>
+                  <a:srgbClr val="F0F5F0"/>
+                </a:solidFill>
+              </a:rPr>
+              <a:t>(планируется) / Telegram API</a:t>
             </a:r>
             <a:endParaRPr lang="en-US" sz="1300" dirty="0"/>
           </a:p>
@@ -8258,7 +8522,7 @@
       </p:sp>
       <p:sp>
         <p:nvSpPr>
-          <p:cNvPr id="5" name="Shape 3"/>
+          <p:cNvPr id="6" name="Text 4"/>
           <p:cNvSpPr/>
           <p:nvPr/>
         </p:nvSpPr>
@@ -8267,31 +8531,6 @@
             <a:off x="438912" y="1353312"/>
             <a:ext cx="502920" cy="502920"/>
           </a:xfrm>
-          <a:prstGeom prst="line">
-            <a:avLst/>
-          </a:prstGeom>
-          <a:solidFill>
-            <a:srgbClr val="1A3A2A"/>
-          </a:solidFill>
-          <a:ln w="12700">
-            <a:solidFill>
-              <a:srgbClr val="1A3A2A"/>
-            </a:solidFill>
-            <a:prstDash val="solid"/>
-          </a:ln>
-        </p:spPr>
-      </p:sp>
-      <p:sp>
-        <p:nvSpPr>
-          <p:cNvPr id="6" name="Text 4"/>
-          <p:cNvSpPr/>
-          <p:nvPr/>
-        </p:nvSpPr>
-        <p:spPr>
-          <a:xfrm>
-            <a:off x="438912" y="1353312"/>
-            <a:ext cx="502920" cy="502920"/>
-          </a:xfrm>
           <a:prstGeom prst="rect">
             <a:avLst/>
           </a:prstGeom>
@@ -8308,12 +8547,20 @@
             <a:r>
               <a:rPr lang="en-US" sz="1100" b="1" dirty="0">
                 <a:solidFill>
-                  <a:srgbClr val="FFFFFF"/>
+                  <a:schemeClr val="accent6">
+                    <a:lumMod val="50000"/>
+                  </a:schemeClr>
                 </a:solidFill>
               </a:rPr>
               <a:t>01</a:t>
             </a:r>
-            <a:endParaRPr lang="en-US" sz="1100" dirty="0"/>
+            <a:endParaRPr lang="en-US" sz="1100" dirty="0">
+              <a:solidFill>
+                <a:schemeClr val="accent6">
+                  <a:lumMod val="50000"/>
+                </a:schemeClr>
+              </a:solidFill>
+            </a:endParaRPr>
           </a:p>
         </p:txBody>
       </p:sp>
@@ -8461,7 +8708,7 @@
       </p:sp>
       <p:sp>
         <p:nvSpPr>
-          <p:cNvPr id="11" name="Shape 9"/>
+          <p:cNvPr id="12" name="Text 10"/>
           <p:cNvSpPr/>
           <p:nvPr/>
         </p:nvSpPr>
@@ -8470,31 +8717,6 @@
             <a:off x="3337560" y="1353312"/>
             <a:ext cx="502920" cy="502920"/>
           </a:xfrm>
-          <a:prstGeom prst="line">
-            <a:avLst/>
-          </a:prstGeom>
-          <a:solidFill>
-            <a:srgbClr val="1A3A2A"/>
-          </a:solidFill>
-          <a:ln w="12700">
-            <a:solidFill>
-              <a:srgbClr val="1A3A2A"/>
-            </a:solidFill>
-            <a:prstDash val="solid"/>
-          </a:ln>
-        </p:spPr>
-      </p:sp>
-      <p:sp>
-        <p:nvSpPr>
-          <p:cNvPr id="12" name="Text 10"/>
-          <p:cNvSpPr/>
-          <p:nvPr/>
-        </p:nvSpPr>
-        <p:spPr>
-          <a:xfrm>
-            <a:off x="3337560" y="1353312"/>
-            <a:ext cx="502920" cy="502920"/>
-          </a:xfrm>
           <a:prstGeom prst="rect">
             <a:avLst/>
           </a:prstGeom>
@@ -8511,12 +8733,20 @@
             <a:r>
               <a:rPr lang="en-US" sz="1100" b="1" dirty="0">
                 <a:solidFill>
-                  <a:srgbClr val="FFFFFF"/>
+                  <a:schemeClr val="accent6">
+                    <a:lumMod val="50000"/>
+                  </a:schemeClr>
                 </a:solidFill>
               </a:rPr>
               <a:t>02</a:t>
             </a:r>
-            <a:endParaRPr lang="en-US" sz="1100" dirty="0"/>
+            <a:endParaRPr lang="en-US" sz="1100" dirty="0">
+              <a:solidFill>
+                <a:schemeClr val="accent6">
+                  <a:lumMod val="50000"/>
+                </a:schemeClr>
+              </a:solidFill>
+            </a:endParaRPr>
           </a:p>
         </p:txBody>
       </p:sp>
@@ -8664,7 +8894,7 @@
       </p:sp>
       <p:sp>
         <p:nvSpPr>
-          <p:cNvPr id="17" name="Shape 15"/>
+          <p:cNvPr id="18" name="Text 16"/>
           <p:cNvSpPr/>
           <p:nvPr/>
         </p:nvSpPr>
@@ -8673,31 +8903,6 @@
             <a:off x="6236208" y="1353312"/>
             <a:ext cx="502920" cy="502920"/>
           </a:xfrm>
-          <a:prstGeom prst="line">
-            <a:avLst/>
-          </a:prstGeom>
-          <a:solidFill>
-            <a:srgbClr val="1A3A2A"/>
-          </a:solidFill>
-          <a:ln w="12700">
-            <a:solidFill>
-              <a:srgbClr val="1A3A2A"/>
-            </a:solidFill>
-            <a:prstDash val="solid"/>
-          </a:ln>
-        </p:spPr>
-      </p:sp>
-      <p:sp>
-        <p:nvSpPr>
-          <p:cNvPr id="18" name="Text 16"/>
-          <p:cNvSpPr/>
-          <p:nvPr/>
-        </p:nvSpPr>
-        <p:spPr>
-          <a:xfrm>
-            <a:off x="6236208" y="1353312"/>
-            <a:ext cx="502920" cy="502920"/>
-          </a:xfrm>
           <a:prstGeom prst="rect">
             <a:avLst/>
           </a:prstGeom>
@@ -8714,12 +8919,20 @@
             <a:r>
               <a:rPr lang="en-US" sz="1100" b="1" dirty="0">
                 <a:solidFill>
-                  <a:srgbClr val="FFFFFF"/>
+                  <a:schemeClr val="accent6">
+                    <a:lumMod val="50000"/>
+                  </a:schemeClr>
                 </a:solidFill>
               </a:rPr>
               <a:t>03</a:t>
             </a:r>
-            <a:endParaRPr lang="en-US" sz="1100" dirty="0"/>
+            <a:endParaRPr lang="en-US" sz="1100" dirty="0">
+              <a:solidFill>
+                <a:schemeClr val="accent6">
+                  <a:lumMod val="50000"/>
+                </a:schemeClr>
+              </a:solidFill>
+            </a:endParaRPr>
           </a:p>
         </p:txBody>
       </p:sp>
@@ -8867,7 +9080,7 @@
       </p:sp>
       <p:sp>
         <p:nvSpPr>
-          <p:cNvPr id="23" name="Shape 21"/>
+          <p:cNvPr id="24" name="Text 22"/>
           <p:cNvSpPr/>
           <p:nvPr/>
         </p:nvSpPr>
@@ -8876,31 +9089,6 @@
             <a:off x="438912" y="3136392"/>
             <a:ext cx="502920" cy="502920"/>
           </a:xfrm>
-          <a:prstGeom prst="line">
-            <a:avLst/>
-          </a:prstGeom>
-          <a:solidFill>
-            <a:srgbClr val="1A3A2A"/>
-          </a:solidFill>
-          <a:ln w="12700">
-            <a:solidFill>
-              <a:srgbClr val="1A3A2A"/>
-            </a:solidFill>
-            <a:prstDash val="solid"/>
-          </a:ln>
-        </p:spPr>
-      </p:sp>
-      <p:sp>
-        <p:nvSpPr>
-          <p:cNvPr id="24" name="Text 22"/>
-          <p:cNvSpPr/>
-          <p:nvPr/>
-        </p:nvSpPr>
-        <p:spPr>
-          <a:xfrm>
-            <a:off x="438912" y="3136392"/>
-            <a:ext cx="502920" cy="502920"/>
-          </a:xfrm>
           <a:prstGeom prst="rect">
             <a:avLst/>
           </a:prstGeom>
@@ -8917,12 +9105,20 @@
             <a:r>
               <a:rPr lang="en-US" sz="1100" b="1" dirty="0">
                 <a:solidFill>
-                  <a:srgbClr val="FFFFFF"/>
+                  <a:schemeClr val="accent6">
+                    <a:lumMod val="50000"/>
+                  </a:schemeClr>
                 </a:solidFill>
               </a:rPr>
               <a:t>04</a:t>
             </a:r>
-            <a:endParaRPr lang="en-US" sz="1100" dirty="0"/>
+            <a:endParaRPr lang="en-US" sz="1100" dirty="0">
+              <a:solidFill>
+                <a:schemeClr val="accent6">
+                  <a:lumMod val="50000"/>
+                </a:schemeClr>
+              </a:solidFill>
+            </a:endParaRPr>
           </a:p>
         </p:txBody>
       </p:sp>
@@ -9070,7 +9266,7 @@
       </p:sp>
       <p:sp>
         <p:nvSpPr>
-          <p:cNvPr id="29" name="Shape 27"/>
+          <p:cNvPr id="30" name="Text 28"/>
           <p:cNvSpPr/>
           <p:nvPr/>
         </p:nvSpPr>
@@ -9079,31 +9275,6 @@
             <a:off x="3337560" y="3136392"/>
             <a:ext cx="502920" cy="502920"/>
           </a:xfrm>
-          <a:prstGeom prst="line">
-            <a:avLst/>
-          </a:prstGeom>
-          <a:solidFill>
-            <a:srgbClr val="1A3A2A"/>
-          </a:solidFill>
-          <a:ln w="12700">
-            <a:solidFill>
-              <a:srgbClr val="1A3A2A"/>
-            </a:solidFill>
-            <a:prstDash val="solid"/>
-          </a:ln>
-        </p:spPr>
-      </p:sp>
-      <p:sp>
-        <p:nvSpPr>
-          <p:cNvPr id="30" name="Text 28"/>
-          <p:cNvSpPr/>
-          <p:nvPr/>
-        </p:nvSpPr>
-        <p:spPr>
-          <a:xfrm>
-            <a:off x="3337560" y="3136392"/>
-            <a:ext cx="502920" cy="502920"/>
-          </a:xfrm>
           <a:prstGeom prst="rect">
             <a:avLst/>
           </a:prstGeom>
@@ -9120,12 +9291,20 @@
             <a:r>
               <a:rPr lang="en-US" sz="1100" b="1" dirty="0">
                 <a:solidFill>
-                  <a:srgbClr val="FFFFFF"/>
+                  <a:schemeClr val="accent6">
+                    <a:lumMod val="50000"/>
+                  </a:schemeClr>
                 </a:solidFill>
               </a:rPr>
               <a:t>05</a:t>
             </a:r>
-            <a:endParaRPr lang="en-US" sz="1100" dirty="0"/>
+            <a:endParaRPr lang="en-US" sz="1100" dirty="0">
+              <a:solidFill>
+                <a:schemeClr val="accent6">
+                  <a:lumMod val="50000"/>
+                </a:schemeClr>
+              </a:solidFill>
+            </a:endParaRPr>
           </a:p>
         </p:txBody>
       </p:sp>
@@ -9273,7 +9452,7 @@
       </p:sp>
       <p:sp>
         <p:nvSpPr>
-          <p:cNvPr id="35" name="Shape 33"/>
+          <p:cNvPr id="36" name="Text 34"/>
           <p:cNvSpPr/>
           <p:nvPr/>
         </p:nvSpPr>
@@ -9282,31 +9461,6 @@
             <a:off x="6236208" y="3136392"/>
             <a:ext cx="502920" cy="502920"/>
           </a:xfrm>
-          <a:prstGeom prst="line">
-            <a:avLst/>
-          </a:prstGeom>
-          <a:solidFill>
-            <a:srgbClr val="1A3A2A"/>
-          </a:solidFill>
-          <a:ln w="12700">
-            <a:solidFill>
-              <a:srgbClr val="1A3A2A"/>
-            </a:solidFill>
-            <a:prstDash val="solid"/>
-          </a:ln>
-        </p:spPr>
-      </p:sp>
-      <p:sp>
-        <p:nvSpPr>
-          <p:cNvPr id="36" name="Text 34"/>
-          <p:cNvSpPr/>
-          <p:nvPr/>
-        </p:nvSpPr>
-        <p:spPr>
-          <a:xfrm>
-            <a:off x="6236208" y="3136392"/>
-            <a:ext cx="502920" cy="502920"/>
-          </a:xfrm>
           <a:prstGeom prst="rect">
             <a:avLst/>
           </a:prstGeom>
@@ -9323,12 +9477,20 @@
             <a:r>
               <a:rPr lang="en-US" sz="1100" b="1" dirty="0">
                 <a:solidFill>
-                  <a:srgbClr val="FFFFFF"/>
+                  <a:schemeClr val="accent6">
+                    <a:lumMod val="50000"/>
+                  </a:schemeClr>
                 </a:solidFill>
               </a:rPr>
               <a:t>06</a:t>
             </a:r>
-            <a:endParaRPr lang="en-US" sz="1100" dirty="0"/>
+            <a:endParaRPr lang="en-US" sz="1100" dirty="0">
+              <a:solidFill>
+                <a:schemeClr val="accent6">
+                  <a:lumMod val="50000"/>
+                </a:schemeClr>
+              </a:solidFill>
+            </a:endParaRPr>
           </a:p>
         </p:txBody>
       </p:sp>
@@ -10704,7 +10866,7 @@
   <a:extraClrSchemeLst/>
   <a:extLst>
     <a:ext uri="{05A4C25C-085E-4340-85A3-A5531E510DB2}">
-      <thm15:themeFamily xmlns:thm15="http://schemas.microsoft.com/office/thememl/2012/main" xmlns="" name="Office Theme" id="{62F939B6-93AF-4DB8-9C6B-D6C7DFDC589F}" vid="{4A3C46E8-61CC-4603-A589-7422A47A8E4A}"/>
+      <thm15:themeFamily xmlns="" xmlns:thm15="http://schemas.microsoft.com/office/thememl/2012/main" name="Office Theme" id="{62F939B6-93AF-4DB8-9C6B-D6C7DFDC589F}" vid="{4A3C46E8-61CC-4603-A589-7422A47A8E4A}"/>
     </a:ext>
   </a:extLst>
 </a:theme>
